--- a/Day35-Observability-Drift-and-Optimisation/Day35_Deck_Observability_Drift_and_Optimisation.pptx
+++ b/Day35-Observability-Drift-and-Optimisation/Day35_Deck_Observability_Drift_and_Optimisation.pptx
@@ -7537,13 +7537,13 @@
           <a:noFill/>
         </p:spPr>
         <p:txBody>
-          <a:bodyPr wrap="square" lIns="0" rIns="0" tIns="0" bIns="0" anchor="t">
-            <a:spAutoFit/>
-          </a:bodyPr>
-          <a:lstStyle/>
-          <a:p>
-            <a:r>
-              <a:rPr sz="1040" b="0" i="0">
+          <a:bodyPr wrap="none" lIns="0" rIns="0" tIns="0" bIns="0" anchor="t">
+            <a:spAutoFit/>
+          </a:bodyPr>
+          <a:lstStyle/>
+          <a:p>
+            <a:r>
+              <a:rPr sz="915" b="0" i="0">
                 <a:solidFill>
                   <a:srgbClr val="EAF7F5"/>
                 </a:solidFill>
@@ -7554,7 +7554,7 @@
           </a:p>
           <a:p>
             <a:r>
-              <a:rPr sz="1040" b="0" i="0">
+              <a:rPr sz="915" b="0" i="0">
                 <a:solidFill>
                   <a:srgbClr val="EAF7F5"/>
                 </a:solidFill>
@@ -7565,7 +7565,7 @@
           </a:p>
           <a:p>
             <a:r>
-              <a:rPr sz="1040" b="0" i="0">
+              <a:rPr sz="915" b="0" i="0">
                 <a:solidFill>
                   <a:srgbClr val="EAF7F5"/>
                 </a:solidFill>
@@ -7576,7 +7576,7 @@
           </a:p>
           <a:p>
             <a:r>
-              <a:rPr sz="1040" b="0" i="0">
+              <a:rPr sz="915" b="0" i="0">
                 <a:solidFill>
                   <a:srgbClr val="EAF7F5"/>
                 </a:solidFill>
@@ -7587,7 +7587,7 @@
           </a:p>
           <a:p>
             <a:r>
-              <a:rPr sz="1040" b="0" i="0">
+              <a:rPr sz="915" b="0" i="0">
                 <a:solidFill>
                   <a:srgbClr val="EAF7F5"/>
                 </a:solidFill>
@@ -7598,7 +7598,7 @@
           </a:p>
           <a:p>
             <a:r>
-              <a:rPr sz="1040" b="0" i="0">
+              <a:rPr sz="915" b="0" i="0">
                 <a:solidFill>
                   <a:srgbClr val="EAF7F5"/>
                 </a:solidFill>
@@ -7609,7 +7609,7 @@
           </a:p>
           <a:p>
             <a:r>
-              <a:rPr sz="1040" b="0" i="0">
+              <a:rPr sz="915" b="0" i="0">
                 <a:solidFill>
                   <a:srgbClr val="EAF7F5"/>
                 </a:solidFill>
@@ -7620,7 +7620,7 @@
           </a:p>
           <a:p>
             <a:r>
-              <a:rPr sz="1040" b="0" i="0">
+              <a:rPr sz="915" b="0" i="0">
                 <a:solidFill>
                   <a:srgbClr val="EAF7F5"/>
                 </a:solidFill>
@@ -7631,7 +7631,7 @@
           </a:p>
           <a:p>
             <a:r>
-              <a:rPr sz="1040" b="0" i="0">
+              <a:rPr sz="915" b="0" i="0">
                 <a:solidFill>
                   <a:srgbClr val="EAF7F5"/>
                 </a:solidFill>
@@ -14312,13 +14312,13 @@
           <a:noFill/>
         </p:spPr>
         <p:txBody>
-          <a:bodyPr wrap="square" lIns="0" rIns="0" tIns="0" bIns="0" anchor="t">
-            <a:spAutoFit/>
-          </a:bodyPr>
-          <a:lstStyle/>
-          <a:p>
-            <a:r>
-              <a:rPr sz="1108" b="0" i="0">
+          <a:bodyPr wrap="none" lIns="0" rIns="0" tIns="0" bIns="0" anchor="t">
+            <a:spAutoFit/>
+          </a:bodyPr>
+          <a:lstStyle/>
+          <a:p>
+            <a:r>
+              <a:rPr sz="975" b="0" i="0">
                 <a:solidFill>
                   <a:srgbClr val="EAF7F5"/>
                 </a:solidFill>
@@ -14329,7 +14329,7 @@
           </a:p>
           <a:p>
             <a:r>
-              <a:rPr sz="1108" b="0" i="0">
+              <a:rPr sz="975" b="0" i="0">
                 <a:solidFill>
                   <a:srgbClr val="EAF7F5"/>
                 </a:solidFill>
@@ -14340,7 +14340,7 @@
           </a:p>
           <a:p>
             <a:r>
-              <a:rPr sz="1108" b="0" i="0">
+              <a:rPr sz="975" b="0" i="0">
                 <a:solidFill>
                   <a:srgbClr val="EAF7F5"/>
                 </a:solidFill>
@@ -14351,7 +14351,7 @@
           </a:p>
           <a:p>
             <a:r>
-              <a:rPr sz="1108" b="0" i="0">
+              <a:rPr sz="975" b="0" i="0">
                 <a:solidFill>
                   <a:srgbClr val="EAF7F5"/>
                 </a:solidFill>
@@ -14362,7 +14362,7 @@
           </a:p>
           <a:p>
             <a:r>
-              <a:rPr sz="1108" b="0" i="0">
+              <a:rPr sz="975" b="0" i="0">
                 <a:solidFill>
                   <a:srgbClr val="EAF7F5"/>
                 </a:solidFill>
@@ -14373,7 +14373,7 @@
           </a:p>
           <a:p>
             <a:r>
-              <a:rPr sz="1108" b="0" i="0">
+              <a:rPr sz="975" b="0" i="0">
                 <a:solidFill>
                   <a:srgbClr val="EAF7F5"/>
                 </a:solidFill>
@@ -14384,7 +14384,7 @@
           </a:p>
           <a:p>
             <a:r>
-              <a:rPr sz="1108" b="0" i="0">
+              <a:rPr sz="975" b="0" i="0">
                 <a:solidFill>
                   <a:srgbClr val="EAF7F5"/>
                 </a:solidFill>
@@ -14395,7 +14395,7 @@
           </a:p>
           <a:p>
             <a:r>
-              <a:rPr sz="1108" b="0" i="0">
+              <a:rPr sz="975" b="0" i="0">
                 <a:solidFill>
                   <a:srgbClr val="EAF7F5"/>
                 </a:solidFill>
@@ -14406,7 +14406,7 @@
           </a:p>
           <a:p>
             <a:r>
-              <a:rPr sz="1108" b="0" i="0">
+              <a:rPr sz="975" b="0" i="0">
                 <a:solidFill>
                   <a:srgbClr val="EAF7F5"/>
                 </a:solidFill>
@@ -14417,7 +14417,7 @@
           </a:p>
           <a:p>
             <a:r>
-              <a:rPr sz="1108" b="0" i="0">
+              <a:rPr sz="975" b="0" i="0">
                 <a:solidFill>
                   <a:srgbClr val="EAF7F5"/>
                 </a:solidFill>
@@ -14428,7 +14428,7 @@
           </a:p>
           <a:p>
             <a:r>
-              <a:rPr sz="1108" b="0" i="0">
+              <a:rPr sz="975" b="0" i="0">
                 <a:solidFill>
                   <a:srgbClr val="EAF7F5"/>
                 </a:solidFill>
@@ -14439,7 +14439,7 @@
           </a:p>
           <a:p>
             <a:r>
-              <a:rPr sz="1108" b="0" i="0">
+              <a:rPr sz="975" b="0" i="0">
                 <a:solidFill>
                   <a:srgbClr val="EAF7F5"/>
                 </a:solidFill>
@@ -19110,13 +19110,13 @@
           <a:noFill/>
         </p:spPr>
         <p:txBody>
-          <a:bodyPr wrap="square" lIns="0" rIns="0" tIns="0" bIns="0" anchor="t">
-            <a:spAutoFit/>
-          </a:bodyPr>
-          <a:lstStyle/>
-          <a:p>
-            <a:r>
-              <a:rPr sz="1085" b="0" i="0">
+          <a:bodyPr wrap="none" lIns="0" rIns="0" tIns="0" bIns="0" anchor="t">
+            <a:spAutoFit/>
+          </a:bodyPr>
+          <a:lstStyle/>
+          <a:p>
+            <a:r>
+              <a:rPr sz="954" b="0" i="0">
                 <a:solidFill>
                   <a:srgbClr val="EAF7F5"/>
                 </a:solidFill>
@@ -19127,7 +19127,7 @@
           </a:p>
           <a:p>
             <a:r>
-              <a:rPr sz="1085" b="0" i="0">
+              <a:rPr sz="954" b="0" i="0">
                 <a:solidFill>
                   <a:srgbClr val="EAF7F5"/>
                 </a:solidFill>
@@ -19138,7 +19138,7 @@
           </a:p>
           <a:p>
             <a:r>
-              <a:rPr sz="1085" b="0" i="0">
+              <a:rPr sz="954" b="0" i="0">
                 <a:solidFill>
                   <a:srgbClr val="EAF7F5"/>
                 </a:solidFill>
@@ -19149,7 +19149,7 @@
           </a:p>
           <a:p>
             <a:r>
-              <a:rPr sz="1085" b="0" i="0">
+              <a:rPr sz="954" b="0" i="0">
                 <a:solidFill>
                   <a:srgbClr val="EAF7F5"/>
                 </a:solidFill>
@@ -19160,7 +19160,7 @@
           </a:p>
           <a:p>
             <a:r>
-              <a:rPr sz="1085" b="0" i="0">
+              <a:rPr sz="954" b="0" i="0">
                 <a:solidFill>
                   <a:srgbClr val="EAF7F5"/>
                 </a:solidFill>
@@ -19169,7 +19169,7 @@
               <a:t>    logging.info(json.dumps({</a:t>
             </a:r>
             <a:r>
-              <a:rPr sz="1085" b="1" i="0">
+              <a:rPr sz="954" b="1" i="0">
                 <a:solidFill>
                   <a:srgbClr val="EAF7F5"/>
                 </a:solidFill>
@@ -19178,7 +19178,7 @@
               <a:t>rec, </a:t>
             </a:r>
             <a:r>
-              <a:rPr sz="1085" b="0" i="0">
+              <a:rPr sz="954" b="0" i="0">
                 <a:solidFill>
                   <a:srgbClr val="EAF7F5"/>
                 </a:solidFill>
@@ -19189,7 +19189,7 @@
           </a:p>
           <a:p>
             <a:r>
-              <a:rPr sz="1085" b="0" i="0">
+              <a:rPr sz="954" b="0" i="0">
                 <a:solidFill>
                   <a:srgbClr val="EAF7F5"/>
                 </a:solidFill>
@@ -19200,7 +19200,7 @@
           </a:p>
           <a:p>
             <a:r>
-              <a:rPr sz="1085" b="0" i="0">
+              <a:rPr sz="954" b="0" i="0">
                 <a:solidFill>
                   <a:srgbClr val="EAF7F5"/>
                 </a:solidFill>
@@ -19211,7 +19211,7 @@
           </a:p>
           <a:p>
             <a:r>
-              <a:rPr sz="1085" b="0" i="0">
+              <a:rPr sz="954" b="0" i="0">
                 <a:solidFill>
                   <a:srgbClr val="EAF7F5"/>
                 </a:solidFill>
@@ -19222,7 +19222,7 @@
           </a:p>
           <a:p>
             <a:r>
-              <a:rPr sz="1085" b="0" i="0">
+              <a:rPr sz="954" b="0" i="0">
                 <a:solidFill>
                   <a:srgbClr val="EAF7F5"/>
                 </a:solidFill>
@@ -19233,7 +19233,7 @@
           </a:p>
           <a:p>
             <a:r>
-              <a:rPr sz="1085" b="0" i="0">
+              <a:rPr sz="954" b="0" i="0">
                 <a:solidFill>
                   <a:srgbClr val="EAF7F5"/>
                 </a:solidFill>
@@ -19244,7 +19244,7 @@
           </a:p>
           <a:p>
             <a:r>
-              <a:rPr sz="1085" b="0" i="0">
+              <a:rPr sz="954" b="0" i="0">
                 <a:solidFill>
                   <a:srgbClr val="EAF7F5"/>
                 </a:solidFill>
@@ -19255,7 +19255,7 @@
           </a:p>
           <a:p>
             <a:r>
-              <a:rPr sz="1085" b="0" i="0">
+              <a:rPr sz="954" b="0" i="0">
                 <a:solidFill>
                   <a:srgbClr val="EAF7F5"/>
                 </a:solidFill>
@@ -20697,13 +20697,13 @@
           <a:noFill/>
         </p:spPr>
         <p:txBody>
-          <a:bodyPr wrap="square" lIns="0" rIns="0" tIns="0" bIns="0" anchor="t">
-            <a:spAutoFit/>
-          </a:bodyPr>
-          <a:lstStyle/>
-          <a:p>
-            <a:r>
-              <a:rPr sz="980" b="0" i="0">
+          <a:bodyPr wrap="none" lIns="0" rIns="0" tIns="0" bIns="0" anchor="t">
+            <a:spAutoFit/>
+          </a:bodyPr>
+          <a:lstStyle/>
+          <a:p>
+            <a:r>
+              <a:rPr sz="863" b="0" i="0">
                 <a:solidFill>
                   <a:srgbClr val="EAF7F5"/>
                 </a:solidFill>
@@ -20714,7 +20714,7 @@
           </a:p>
           <a:p>
             <a:r>
-              <a:rPr sz="980" b="0" i="0">
+              <a:rPr sz="863" b="0" i="0">
                 <a:solidFill>
                   <a:srgbClr val="EAF7F5"/>
                 </a:solidFill>
@@ -20725,7 +20725,7 @@
           </a:p>
           <a:p>
             <a:r>
-              <a:rPr sz="980" b="0" i="0">
+              <a:rPr sz="863" b="0" i="0">
                 <a:solidFill>
                   <a:srgbClr val="EAF7F5"/>
                 </a:solidFill>
@@ -20736,7 +20736,7 @@
           </a:p>
           <a:p>
             <a:r>
-              <a:rPr sz="980" b="0" i="0">
+              <a:rPr sz="863" b="0" i="0">
                 <a:solidFill>
                   <a:srgbClr val="EAF7F5"/>
                 </a:solidFill>
@@ -20747,7 +20747,7 @@
           </a:p>
           <a:p>
             <a:r>
-              <a:rPr sz="980" b="0" i="0">
+              <a:rPr sz="863" b="0" i="0">
                 <a:solidFill>
                   <a:srgbClr val="EAF7F5"/>
                 </a:solidFill>
@@ -20758,7 +20758,7 @@
           </a:p>
           <a:p>
             <a:r>
-              <a:rPr sz="980" b="0" i="0">
+              <a:rPr sz="863" b="0" i="0">
                 <a:solidFill>
                   <a:srgbClr val="EAF7F5"/>
                 </a:solidFill>
@@ -20769,7 +20769,7 @@
           </a:p>
           <a:p>
             <a:r>
-              <a:rPr sz="980" b="0" i="0">
+              <a:rPr sz="863" b="0" i="0">
                 <a:solidFill>
                   <a:srgbClr val="EAF7F5"/>
                 </a:solidFill>
@@ -20780,7 +20780,7 @@
           </a:p>
           <a:p>
             <a:r>
-              <a:rPr sz="980" b="0" i="0">
+              <a:rPr sz="863" b="0" i="0">
                 <a:solidFill>
                   <a:srgbClr val="EAF7F5"/>
                 </a:solidFill>
@@ -20791,7 +20791,7 @@
           </a:p>
           <a:p>
             <a:r>
-              <a:rPr sz="980" b="0" i="0">
+              <a:rPr sz="863" b="0" i="0">
                 <a:solidFill>
                   <a:srgbClr val="EAF7F5"/>
                 </a:solidFill>
@@ -20802,7 +20802,7 @@
           </a:p>
           <a:p>
             <a:r>
-              <a:rPr sz="980" b="0" i="0">
+              <a:rPr sz="863" b="0" i="0">
                 <a:solidFill>
                   <a:srgbClr val="EAF7F5"/>
                 </a:solidFill>
@@ -20813,7 +20813,7 @@
           </a:p>
           <a:p>
             <a:r>
-              <a:rPr sz="980" b="0" i="0">
+              <a:rPr sz="863" b="0" i="0">
                 <a:solidFill>
                   <a:srgbClr val="EAF7F5"/>
                 </a:solidFill>
